--- a/DBTUNING/ch07_SARGable_SQL/ch07_교안.pptx
+++ b/DBTUNING/ch07_SARGable_SQL/ch07_교안.pptx
@@ -542,7 +542,7 @@
           <a:lstStyle/>
           <a:p>
             <a:r>
-              <a:t>제6장은 5장에서 만든 인덱스가 실제로 쓰이는지를 따지는 장이다. 인덱스를 만들었는데도 느리다는 신고가 들어오면 원인은 대개 통계나 하드웨어가 아니라 조건절을 쓴 방식에 있다. 이번 차시의 실행계획과 Buffers는 모두 진료비청구심사 실습 DB에서 캡처한 실측값이며, 학습자가 같은 SQL을 실행해 그대로 재현할 수 있다. 첫머리에 못 박을 메시지는 하나다. 인덱스를 만드는 일과 인덱스를 타게 하는 일은 별개이며, 뒤쪽은 전적으로 조건절 작성 방식에 달려 있다는 점이다. 실습용 인덱스를 만들고 지우는 차시이므로 종료 시 정리 규칙도 함께 안내한다.</a:t>
+              <a:t>제ch07은 ch06에서 만든 인덱스가 실제로 쓰이는지를 따지는 장이다. 인덱스를 만들었는데도 느리다는 신고가 들어오면 원인은 대개 통계나 하드웨어가 아니라 조건절을 쓴 방식에 있다. 이번 차시의 실행계획과 Buffers는 모두 진료비청구심사 실습 DB에서 캡처한 실측값이며, 학습자가 같은 SQL을 실행해 그대로 재현할 수 있다. 첫머리에 못 박을 메시지는 하나다. 인덱스를 만드는 일과 인덱스를 타게 하는 일은 별개이며, 뒤쪽은 전적으로 조건절 작성 방식에 달려 있다는 점이다. 실습용 인덱스를 만들고 지우는 차시이므로 종료 시 정리 규칙도 함께 안내한다.</a:t>
             </a:r>
           </a:p>
         </p:txBody>
@@ -1312,7 +1312,7 @@
           <a:lstStyle/>
           <a:p>
             <a:r>
-              <a:t>학습 목표는 세 묶음이다. 첫째는 정의로, SARGable이라는 낱말을 컬럼 가공 여부라는 한 가지 기준으로 환원해 이해하는 것이다. 둘째는 진단으로, 실행계획의 Predicate Information에서 컬럼이 함수에 감싸였는지 찾아 읽는 능력이다. 셋째는 재작성으로, 위반 조건을 같은 결과를 내는 SARGable한 형태로 바꾸는 기술이다. 이 장은 인덱스를 새로 설계하는 장이 아니라 이미 있는 인덱스를 쓰게 만드는 장이라는 점을 미리 알려 주면 5장과의 경계가 분명해진다. 각 목표가 몇 번 절과 대응하는지 짚어 주면 학습자가 진행 중에 위치를 잃지 않는다.</a:t>
+              <a:t>학습 목표는 세 묶음이다. 첫째는 정의로, SARGable이라는 낱말을 컬럼 가공 여부라는 한 가지 기준으로 환원해 이해하는 것이다. 둘째는 진단으로, 실행계획의 Predicate Information에서 컬럼이 함수에 감싸였는지 찾아 읽는 능력이다. 셋째는 재작성으로, 위반 조건을 같은 결과를 내는 SARGable한 형태로 바꾸는 기술이다. 이 장은 인덱스를 새로 설계하는 장이 아니라 이미 있는 인덱스를 쓰게 만드는 장이라는 점을 미리 알려 주면 ch06과의 경계가 분명해진다. 각 목표가 몇 번 절과 대응하는지 짚어 주면 학습자가 진행 중에 위치를 잃지 않는다.</a:t>
             </a:r>
           </a:p>
         </p:txBody>
@@ -2852,7 +2852,7 @@
           <a:lstStyle/>
           <a:p>
             <a:r>
-              <a:t>5장에서 학습자는 '인덱스를 만들면 빨라진다'는 경험을 했다. 그 경험이 강할수록 인덱스를 만들었는데 느리다는 상황을 만나면 원인을 엉뚱한 곳에서 찾게 된다. 이 절의 목적은 인덱스 생성과 인덱스 사용을 분리해서 보게 만드는 것이다. 두 가지는 별개의 사건이고, 사이에 조건절 작성 방식이라는 변수가 하나 더 있다는 점을 합의하고 넘어간다. 이 절에는 실행계획이 나오지 않으므로 학습자에게 지금까지 인덱스가 안 먹힌 경험이 있는지 먼저 물어 보고 시작하면 이후 전개가 훨씬 잘 붙는다. 5장과 6장을 인덱스 단원으로 묶어 소개하면 두 장의 관계를 잡기 쉬워진다.</a:t>
+              <a:t>ch06에서 학습자는 '인덱스를 만들면 빨라진다'는 경험을 했다. 그 경험이 강할수록 인덱스를 만들었는데 느리다는 상황을 만나면 원인을 엉뚱한 곳에서 찾게 된다. 이 절의 목적은 인덱스 생성과 인덱스 사용을 분리해서 보게 만드는 것이다. 두 가지는 별개의 사건이고, 사이에 조건절 작성 방식이라는 변수가 하나 더 있다는 점을 합의하고 넘어간다. 이 절에는 실행계획이 나오지 않으므로 학습자에게 지금까지 인덱스가 안 먹힌 경험이 있는지 먼저 물어 보고 시작하면 이후 전개가 훨씬 잘 붙는다. ch06과 ch07을 인덱스 단원으로 묶어 소개하면 두 장의 관계를 잡기 쉬워진다.</a:t>
             </a:r>
           </a:p>
         </p:txBody>
@@ -6429,7 +6429,7 @@
                 </a:solidFill>
                 <a:latin typeface="Malgun Gothic"/>
               </a:rPr>
-              <a:t>Oracle SQL 튜닝 과정  ·  제6장</a:t>
+              <a:t>Oracle SQL 튜닝 과정  ·  제ch07</a:t>
             </a:r>
           </a:p>
         </p:txBody>
@@ -14949,7 +14949,7 @@
                 </a:solidFill>
                 <a:latin typeface="Malgun Gothic"/>
               </a:rPr>
-              <a:t>•  5장에서 남겨 둔 질문</a:t>
+              <a:t>•  ch06에서 남겨 둔 질문</a:t>
             </a:r>
           </a:p>
           <a:p>
@@ -15335,7 +15335,7 @@
                 </a:solidFill>
                 <a:latin typeface="Malgun Gothic"/>
               </a:rPr>
-              <a:t>•  실습문제 10문항 — SQL튜닝_Ch06_문제.md</a:t>
+              <a:t>•  실습문제 10문항 — ch07_문제.md</a:t>
             </a:r>
           </a:p>
           <a:p>
@@ -15538,7 +15538,7 @@
                 </a:solidFill>
                 <a:latin typeface="Malgun Gothic"/>
               </a:rPr>
-              <a:t>5장에서 남겨 둔 질문</a:t>
+              <a:t>ch06에서 남겨 둔 질문</a:t>
             </a:r>
           </a:p>
         </p:txBody>
@@ -15572,7 +15572,7 @@
                 </a:solidFill>
                 <a:latin typeface="Malgun Gothic"/>
               </a:rPr>
-              <a:t>•  Chapter 5에서 확인한 것 — '인덱스를 만들면 빨라진다'</a:t>
+              <a:t>•  ch06에서 확인한 것 — '인덱스를 만들면 빨라진다'</a:t>
             </a:r>
           </a:p>
           <a:p>

--- a/DBTUNING/ch07_SARGable_SQL/ch07_교안.pptx
+++ b/DBTUNING/ch07_SARGable_SQL/ch07_교안.pptx
@@ -542,7 +542,7 @@
           <a:lstStyle/>
           <a:p>
             <a:r>
-              <a:t>제ch07은 ch06에서 만든 인덱스가 실제로 쓰이는지를 따지는 장이다. 인덱스를 만들었는데도 느리다는 신고가 들어오면 원인은 대개 통계나 하드웨어가 아니라 조건절을 쓴 방식에 있다. 이번 차시의 실행계획과 Buffers는 모두 진료비청구심사 실습 DB에서 캡처한 실측값이며, 학습자가 같은 SQL을 실행해 그대로 재현할 수 있다. 첫머리에 못 박을 메시지는 하나다. 인덱스를 만드는 일과 인덱스를 타게 하는 일은 별개이며, 뒤쪽은 전적으로 조건절 작성 방식에 달려 있다는 점이다. 실습용 인덱스를 만들고 지우는 차시이므로 종료 시 정리 규칙도 함께 안내한다.</a:t>
+              <a:t>ch07은 ch06에서 만든 인덱스가 실제로 쓰이는지를 따지는 장이다. 인덱스를 만들었는데도 느리다는 신고가 들어오면 원인은 대개 통계나 하드웨어가 아니라 조건절을 쓴 방식에 있다. 이번 차시의 실행계획과 Buffers는 모두 진료비청구심사 실습 DB에서 캡처한 실측값이며, 학습자가 같은 SQL을 실행해 그대로 재현할 수 있다. 첫머리에 못 박을 메시지는 하나다. 인덱스를 만드는 일과 인덱스를 타게 하는 일은 별개이며, 뒤쪽은 전적으로 조건절 작성 방식에 달려 있다는 점이다. 실습용 인덱스를 만들고 지우는 차시이므로 종료 시 정리 규칙도 함께 안내한다.</a:t>
             </a:r>
           </a:p>
         </p:txBody>
@@ -6429,7 +6429,7 @@
                 </a:solidFill>
                 <a:latin typeface="Malgun Gothic"/>
               </a:rPr>
-              <a:t>Oracle SQL 튜닝 과정  ·  제ch07</a:t>
+              <a:t>Oracle SQL 튜닝 과정  ·  ch07</a:t>
             </a:r>
           </a:p>
         </p:txBody>
